--- a/Quadro_Aulas_Report_2026-06-09.pptx
+++ b/Quadro_Aulas_Report_2026-06-09.pptx
@@ -1038,7 +1038,7 @@
                   <a:srgbClr val="8FA3C0"/>
                 </a:solidFill>
               </a:rPr>
-              <a:t>9 de Junho de 2026 as 08:09</a:t>
+              <a:t>9 de Junho de 2026 as 20:15</a:t>
             </a:r>
             <a:endParaRPr lang="en-US" sz="700" dirty="0"/>
           </a:p>
@@ -1207,7 +1207,7 @@
                   <a:srgbClr val="4ADE80"/>
                 </a:solidFill>
               </a:rPr>
-              <a:t>246</a:t>
+              <a:t>253</a:t>
             </a:r>
             <a:endParaRPr lang="en-US" sz="2400" dirty="0"/>
           </a:p>
@@ -1279,7 +1279,7 @@
                   <a:srgbClr val="FCD34D"/>
                 </a:solidFill>
               </a:rPr>
-              <a:t>15</a:t>
+              <a:t>16</a:t>
             </a:r>
             <a:endParaRPr lang="en-US" sz="2400" dirty="0"/>
           </a:p>
@@ -1351,7 +1351,7 @@
                   <a:srgbClr val="F87171"/>
                 </a:solidFill>
               </a:rPr>
-              <a:t>87</a:t>
+              <a:t>79</a:t>
             </a:r>
             <a:endParaRPr lang="en-US" sz="2400" dirty="0"/>
           </a:p>
@@ -1427,7 +1427,7 @@
         <p:spPr>
           <a:xfrm>
             <a:off x="137160" y="3538728"/>
-            <a:ext cx="1419606" cy="91440"/>
+            <a:ext cx="1460754" cy="91440"/>
           </a:xfrm>
           <a:prstGeom prst="rect">
             <a:avLst/>
@@ -1473,7 +1473,7 @@
                   <a:srgbClr val="8FA3C0"/>
                 </a:solidFill>
               </a:rPr>
-              <a:t>69% concluido  .  246 de 358 itens</a:t>
+              <a:t>71% concluido  .  253 de 358 itens</a:t>
             </a:r>
             <a:endParaRPr lang="en-US" sz="700" dirty="0"/>
           </a:p>
@@ -1854,7 +1854,7 @@
                   <a:srgbClr val="222222"/>
                 </a:solidFill>
               </a:rPr>
-              <a:t>A Fazer: 10 . Em progresso: 0 . Finalizados: 59</a:t>
+              <a:t>A Fazer: 9 . Em progresso: 1 . Finalizados: 59</a:t>
             </a:r>
             <a:endParaRPr lang="en-US" sz="750" dirty="0"/>
           </a:p>
@@ -2263,7 +2263,7 @@
                   <a:srgbClr val="222222"/>
                 </a:solidFill>
               </a:rPr>
-              <a:t>A Fazer: 13 . Em progresso: 3 . Finalizados: 85</a:t>
+              <a:t>A Fazer: 12 . Em progresso: 3 . Finalizados: 86</a:t>
             </a:r>
             <a:endParaRPr lang="en-US" sz="750" dirty="0"/>
           </a:p>
@@ -2299,7 +2299,7 @@
                   <a:srgbClr val="222222"/>
                 </a:solidFill>
               </a:rPr>
-              <a:t>Est: 402h . Real: 450.4h . Rem: 23.5h</a:t>
+              <a:t>Est: 402h . Real: 462.4h . Rem: 15.5h</a:t>
             </a:r>
             <a:endParaRPr lang="en-US" sz="750" dirty="0"/>
           </a:p>
@@ -2425,7 +2425,7 @@
         <p:spPr>
           <a:xfrm>
             <a:off x="4946904" y="1033272"/>
-            <a:ext cx="1851111" cy="50292"/>
+            <a:ext cx="1873148" cy="50292"/>
           </a:xfrm>
           <a:prstGeom prst="rect">
             <a:avLst/>
@@ -2471,7 +2471,7 @@
                   <a:srgbClr val="888888"/>
                 </a:solidFill>
               </a:rPr>
-              <a:t>Subs: 84% · 85 de 101</a:t>
+              <a:t>Subs: 85% · 86 de 101</a:t>
             </a:r>
             <a:endParaRPr lang="en-US" sz="650" dirty="0"/>
           </a:p>
@@ -2507,7 +2507,7 @@
                   <a:srgbClr val="D97706"/>
                 </a:solidFill>
               </a:rPr>
-              <a:t>Projetado: 473.9h (+71.9h / +18%)</a:t>
+              <a:t>Projetado: 477.9h (+75.9h / +19%)</a:t>
             </a:r>
             <a:endParaRPr lang="en-US" sz="800" dirty="0"/>
           </a:p>
@@ -2515,7 +2515,140 @@
       </p:sp>
       <p:sp>
         <p:nvSpPr>
-          <p:cNvPr id="52" name="Shape 50"/>
+          <p:cNvPr id="52" name="Text 50"/>
+          <p:cNvSpPr/>
+          <p:nvPr/>
+        </p:nvSpPr>
+        <p:spPr>
+          <a:xfrm>
+            <a:off x="4946904" y="1417320"/>
+            <a:ext cx="2203704" cy="146304"/>
+          </a:xfrm>
+          <a:prstGeom prst="rect">
+            <a:avLst/>
+          </a:prstGeom>
+          <a:noFill/>
+          <a:ln/>
+        </p:spPr>
+        <p:txBody>
+          <a:bodyPr wrap="square" lIns="0" tIns="0" rIns="0" bIns="0" rtlCol="0" anchor="ctr"/>
+          <a:lstStyle/>
+          <a:p>
+            <a:pPr algn="l" indent="0" marL="0">
+              <a:buNone/>
+            </a:pPr>
+            <a:r>
+              <a:rPr lang="en-US" sz="750" b="1" dirty="0">
+                <a:solidFill>
+                  <a:srgbClr val="534AB7"/>
+                </a:solidFill>
+              </a:rPr>
+              <a:t>1 ativo(s) com horas estouradas</a:t>
+            </a:r>
+            <a:endParaRPr lang="en-US" sz="750" dirty="0"/>
+          </a:p>
+        </p:txBody>
+      </p:sp>
+      <p:sp>
+        <p:nvSpPr>
+          <p:cNvPr id="53" name="Shape 51"/>
+          <p:cNvSpPr/>
+          <p:nvPr/>
+        </p:nvSpPr>
+        <p:spPr>
+          <a:xfrm>
+            <a:off x="4946904" y="1581912"/>
+            <a:ext cx="2203704" cy="448056"/>
+          </a:xfrm>
+          <a:prstGeom prst="rect">
+            <a:avLst/>
+          </a:prstGeom>
+          <a:solidFill>
+            <a:srgbClr val="FFF8F8"/>
+          </a:solidFill>
+          <a:ln w="12700">
+            <a:solidFill>
+              <a:srgbClr val="FCA5A5"/>
+            </a:solidFill>
+            <a:prstDash val="solid"/>
+          </a:ln>
+        </p:spPr>
+      </p:sp>
+      <p:sp>
+        <p:nvSpPr>
+          <p:cNvPr id="54" name="Text 52"/>
+          <p:cNvSpPr/>
+          <p:nvPr/>
+        </p:nvSpPr>
+        <p:spPr>
+          <a:xfrm>
+            <a:off x="4965192" y="1600200"/>
+            <a:ext cx="2167128" cy="128016"/>
+          </a:xfrm>
+          <a:prstGeom prst="rect">
+            <a:avLst/>
+          </a:prstGeom>
+          <a:noFill/>
+          <a:ln/>
+        </p:spPr>
+        <p:txBody>
+          <a:bodyPr wrap="square" lIns="0" tIns="0" rIns="0" bIns="0" rtlCol="0" anchor="ctr"/>
+          <a:lstStyle/>
+          <a:p>
+            <a:pPr algn="l" indent="0" marL="0">
+              <a:buNone/>
+            </a:pPr>
+            <a:r>
+              <a:rPr lang="en-US" sz="650" dirty="0">
+                <a:solidFill>
+                  <a:srgbClr val="222222"/>
+                </a:solidFill>
+              </a:rPr>
+              <a:t>[backend] Implementar endpoint /links/au</a:t>
+            </a:r>
+            <a:endParaRPr lang="en-US" sz="650" dirty="0"/>
+          </a:p>
+        </p:txBody>
+      </p:sp>
+      <p:sp>
+        <p:nvSpPr>
+          <p:cNvPr id="55" name="Text 53"/>
+          <p:cNvSpPr/>
+          <p:nvPr/>
+        </p:nvSpPr>
+        <p:spPr>
+          <a:xfrm>
+            <a:off x="4965192" y="1728216"/>
+            <a:ext cx="2167128" cy="128016"/>
+          </a:xfrm>
+          <a:prstGeom prst="rect">
+            <a:avLst/>
+          </a:prstGeom>
+          <a:noFill/>
+          <a:ln/>
+        </p:spPr>
+        <p:txBody>
+          <a:bodyPr wrap="square" lIns="0" tIns="0" rIns="0" bIns="0" rtlCol="0" anchor="ctr"/>
+          <a:lstStyle/>
+          <a:p>
+            <a:pPr algn="l" indent="0" marL="0">
+              <a:buNone/>
+            </a:pPr>
+            <a:r>
+              <a:rPr lang="en-US" sz="700" b="1" dirty="0">
+                <a:solidFill>
+                  <a:srgbClr val="DC2626"/>
+                </a:solidFill>
+              </a:rPr>
+              <a:t>+3h (+75%)</a:t>
+            </a:r>
+            <a:endParaRPr lang="en-US" sz="700" dirty="0"/>
+          </a:p>
+        </p:txBody>
+      </p:sp>
+      <p:sp>
+        <p:nvSpPr>
+          <p:cNvPr id="56" name="Shape 54"/>
           <p:cNvSpPr/>
           <p:nvPr/>
         </p:nvSpPr>
@@ -2540,7 +2673,7 @@
       </p:sp>
       <p:sp>
         <p:nvSpPr>
-          <p:cNvPr id="53" name="Text 51"/>
+          <p:cNvPr id="57" name="Text 55"/>
           <p:cNvSpPr/>
           <p:nvPr/>
         </p:nvSpPr>
@@ -2576,7 +2709,7 @@
       </p:sp>
       <p:sp>
         <p:nvSpPr>
-          <p:cNvPr id="54" name="Text 52"/>
+          <p:cNvPr id="58" name="Text 56"/>
           <p:cNvSpPr/>
           <p:nvPr/>
         </p:nvSpPr>
@@ -2612,7 +2745,7 @@
       </p:sp>
       <p:sp>
         <p:nvSpPr>
-          <p:cNvPr id="55" name="Text 53"/>
+          <p:cNvPr id="59" name="Text 57"/>
           <p:cNvSpPr/>
           <p:nvPr/>
         </p:nvSpPr>
@@ -2648,7 +2781,7 @@
       </p:sp>
       <p:sp>
         <p:nvSpPr>
-          <p:cNvPr id="56" name="Shape 54"/>
+          <p:cNvPr id="60" name="Shape 58"/>
           <p:cNvSpPr/>
           <p:nvPr/>
         </p:nvSpPr>
@@ -2680,7 +2813,7 @@
       </p:sp>
       <p:sp>
         <p:nvSpPr>
-          <p:cNvPr id="57" name="Text 55"/>
+          <p:cNvPr id="61" name="Text 59"/>
           <p:cNvSpPr/>
           <p:nvPr/>
         </p:nvSpPr>
@@ -2716,7 +2849,7 @@
       </p:sp>
       <p:sp>
         <p:nvSpPr>
-          <p:cNvPr id="58" name="Text 56"/>
+          <p:cNvPr id="62" name="Text 60"/>
           <p:cNvSpPr/>
           <p:nvPr/>
         </p:nvSpPr>
@@ -2752,7 +2885,7 @@
       </p:sp>
       <p:sp>
         <p:nvSpPr>
-          <p:cNvPr id="59" name="Text 57"/>
+          <p:cNvPr id="63" name="Text 61"/>
           <p:cNvSpPr/>
           <p:nvPr/>
         </p:nvSpPr>
@@ -2788,7 +2921,7 @@
       </p:sp>
       <p:sp>
         <p:nvSpPr>
-          <p:cNvPr id="60" name="Shape 58"/>
+          <p:cNvPr id="64" name="Shape 62"/>
           <p:cNvSpPr/>
           <p:nvPr/>
         </p:nvSpPr>
@@ -2813,7 +2946,7 @@
       </p:sp>
       <p:sp>
         <p:nvSpPr>
-          <p:cNvPr id="61" name="Shape 59"/>
+          <p:cNvPr id="65" name="Shape 63"/>
           <p:cNvSpPr/>
           <p:nvPr/>
         </p:nvSpPr>
@@ -2838,7 +2971,7 @@
       </p:sp>
       <p:sp>
         <p:nvSpPr>
-          <p:cNvPr id="62" name="Text 60"/>
+          <p:cNvPr id="66" name="Text 64"/>
           <p:cNvSpPr/>
           <p:nvPr/>
         </p:nvSpPr>
@@ -2874,7 +3007,7 @@
       </p:sp>
       <p:sp>
         <p:nvSpPr>
-          <p:cNvPr id="63" name="Shape 61"/>
+          <p:cNvPr id="67" name="Shape 65"/>
           <p:cNvSpPr/>
           <p:nvPr/>
         </p:nvSpPr>
@@ -2899,7 +3032,7 @@
       </p:sp>
       <p:sp>
         <p:nvSpPr>
-          <p:cNvPr id="64" name="Shape 62"/>
+          <p:cNvPr id="68" name="Shape 66"/>
           <p:cNvSpPr/>
           <p:nvPr/>
         </p:nvSpPr>
@@ -2924,7 +3057,7 @@
       </p:sp>
       <p:sp>
         <p:nvSpPr>
-          <p:cNvPr id="65" name="Text 63"/>
+          <p:cNvPr id="69" name="Text 67"/>
           <p:cNvSpPr/>
           <p:nvPr/>
         </p:nvSpPr>
@@ -2960,7 +3093,7 @@
       </p:sp>
       <p:sp>
         <p:nvSpPr>
-          <p:cNvPr id="66" name="Text 64"/>
+          <p:cNvPr id="70" name="Text 68"/>
           <p:cNvSpPr/>
           <p:nvPr/>
         </p:nvSpPr>
@@ -2996,7 +3129,7 @@
       </p:sp>
       <p:sp>
         <p:nvSpPr>
-          <p:cNvPr id="67" name="Shape 65"/>
+          <p:cNvPr id="71" name="Shape 69"/>
           <p:cNvSpPr/>
           <p:nvPr/>
         </p:nvSpPr>
@@ -3021,7 +3154,7 @@
       </p:sp>
       <p:sp>
         <p:nvSpPr>
-          <p:cNvPr id="68" name="Text 66"/>
+          <p:cNvPr id="72" name="Text 70"/>
           <p:cNvSpPr/>
           <p:nvPr/>
         </p:nvSpPr>
@@ -3057,7 +3190,7 @@
       </p:sp>
       <p:sp>
         <p:nvSpPr>
-          <p:cNvPr id="69" name="Shape 67"/>
+          <p:cNvPr id="73" name="Shape 71"/>
           <p:cNvSpPr/>
           <p:nvPr/>
         </p:nvSpPr>
@@ -3089,7 +3222,7 @@
       </p:sp>
       <p:sp>
         <p:nvSpPr>
-          <p:cNvPr id="70" name="Text 68"/>
+          <p:cNvPr id="74" name="Text 72"/>
           <p:cNvSpPr/>
           <p:nvPr/>
         </p:nvSpPr>
@@ -3125,7 +3258,7 @@
       </p:sp>
       <p:sp>
         <p:nvSpPr>
-          <p:cNvPr id="71" name="Text 69"/>
+          <p:cNvPr id="75" name="Text 73"/>
           <p:cNvSpPr/>
           <p:nvPr/>
         </p:nvSpPr>
@@ -3153,7 +3286,7 @@
                   <a:srgbClr val="222222"/>
                 </a:solidFill>
               </a:rPr>
-              <a:t>A Fazer: 63 . Em progresso: 1 . Finalizados: 43</a:t>
+              <a:t>A Fazer: 57 . Em progresso: 1 . Finalizados: 49</a:t>
             </a:r>
             <a:endParaRPr lang="en-US" sz="750" dirty="0"/>
           </a:p>
@@ -3161,7 +3294,7 @@
       </p:sp>
       <p:sp>
         <p:nvSpPr>
-          <p:cNvPr id="72" name="Text 70"/>
+          <p:cNvPr id="76" name="Text 74"/>
           <p:cNvSpPr/>
           <p:nvPr/>
         </p:nvSpPr>
@@ -3189,7 +3322,7 @@
                   <a:srgbClr val="222222"/>
                 </a:solidFill>
               </a:rPr>
-              <a:t>Est: 488.5h . Real: 188.5h . Rem: 282.5h</a:t>
+              <a:t>Est: 488.5h . Real: 191.5h . Rem: 270.5h</a:t>
             </a:r>
             <a:endParaRPr lang="en-US" sz="750" dirty="0"/>
           </a:p>
@@ -3197,7 +3330,7 @@
       </p:sp>
       <p:sp>
         <p:nvSpPr>
-          <p:cNvPr id="73" name="Shape 71"/>
+          <p:cNvPr id="77" name="Shape 75"/>
           <p:cNvSpPr/>
           <p:nvPr/>
         </p:nvSpPr>
@@ -3222,7 +3355,7 @@
       </p:sp>
       <p:sp>
         <p:nvSpPr>
-          <p:cNvPr id="74" name="Shape 72"/>
+          <p:cNvPr id="78" name="Shape 76"/>
           <p:cNvSpPr/>
           <p:nvPr/>
         </p:nvSpPr>
@@ -3247,7 +3380,7 @@
       </p:sp>
       <p:sp>
         <p:nvSpPr>
-          <p:cNvPr id="75" name="Text 73"/>
+          <p:cNvPr id="79" name="Text 77"/>
           <p:cNvSpPr/>
           <p:nvPr/>
         </p:nvSpPr>
@@ -3283,7 +3416,7 @@
       </p:sp>
       <p:sp>
         <p:nvSpPr>
-          <p:cNvPr id="76" name="Shape 74"/>
+          <p:cNvPr id="80" name="Shape 78"/>
           <p:cNvSpPr/>
           <p:nvPr/>
         </p:nvSpPr>
@@ -3308,14 +3441,14 @@
       </p:sp>
       <p:sp>
         <p:nvSpPr>
-          <p:cNvPr id="77" name="Shape 75"/>
+          <p:cNvPr id="81" name="Shape 79"/>
           <p:cNvSpPr/>
           <p:nvPr/>
         </p:nvSpPr>
         <p:spPr>
           <a:xfrm>
             <a:off x="9811512" y="1033272"/>
-            <a:ext cx="881482" cy="50292"/>
+            <a:ext cx="1013704" cy="50292"/>
           </a:xfrm>
           <a:prstGeom prst="rect">
             <a:avLst/>
@@ -3333,7 +3466,7 @@
       </p:sp>
       <p:sp>
         <p:nvSpPr>
-          <p:cNvPr id="78" name="Text 76"/>
+          <p:cNvPr id="82" name="Text 80"/>
           <p:cNvSpPr/>
           <p:nvPr/>
         </p:nvSpPr>
@@ -3361,7 +3494,7 @@
                   <a:srgbClr val="888888"/>
                 </a:solidFill>
               </a:rPr>
-              <a:t>Subs: 40% · 43 de 107</a:t>
+              <a:t>Subs: 46% · 49 de 107</a:t>
             </a:r>
             <a:endParaRPr lang="en-US" sz="650" dirty="0"/>
           </a:p>
@@ -3369,7 +3502,7 @@
       </p:sp>
       <p:sp>
         <p:nvSpPr>
-          <p:cNvPr id="79" name="Text 77"/>
+          <p:cNvPr id="83" name="Text 81"/>
           <p:cNvSpPr/>
           <p:nvPr/>
         </p:nvSpPr>
@@ -3397,7 +3530,7 @@
                   <a:srgbClr val="1D9E75"/>
                 </a:solidFill>
               </a:rPr>
-              <a:t>Projetado: 471h (-17.5h / -4%)</a:t>
+              <a:t>Projetado: 462h (-26.5h / -5%)</a:t>
             </a:r>
             <a:endParaRPr lang="en-US" sz="800" dirty="0"/>
           </a:p>
@@ -3405,7 +3538,7 @@
       </p:sp>
       <p:sp>
         <p:nvSpPr>
-          <p:cNvPr id="80" name="Shape 78"/>
+          <p:cNvPr id="84" name="Shape 82"/>
           <p:cNvSpPr/>
           <p:nvPr/>
         </p:nvSpPr>
@@ -3437,7 +3570,7 @@
       </p:sp>
       <p:sp>
         <p:nvSpPr>
-          <p:cNvPr id="81" name="Text 79"/>
+          <p:cNvPr id="85" name="Text 83"/>
           <p:cNvSpPr/>
           <p:nvPr/>
         </p:nvSpPr>
@@ -3473,7 +3606,7 @@
       </p:sp>
       <p:sp>
         <p:nvSpPr>
-          <p:cNvPr id="82" name="Text 80"/>
+          <p:cNvPr id="86" name="Text 84"/>
           <p:cNvSpPr/>
           <p:nvPr/>
         </p:nvSpPr>
@@ -3509,7 +3642,7 @@
       </p:sp>
       <p:sp>
         <p:nvSpPr>
-          <p:cNvPr id="83" name="Text 81"/>
+          <p:cNvPr id="87" name="Text 85"/>
           <p:cNvSpPr/>
           <p:nvPr/>
         </p:nvSpPr>
@@ -3545,7 +3678,7 @@
       </p:sp>
       <p:sp>
         <p:nvSpPr>
-          <p:cNvPr id="84" name="Text 82"/>
+          <p:cNvPr id="88" name="Text 86"/>
           <p:cNvSpPr/>
           <p:nvPr/>
         </p:nvSpPr>
@@ -3581,7 +3714,7 @@
       </p:sp>
       <p:sp>
         <p:nvSpPr>
-          <p:cNvPr id="85" name="Shape 83"/>
+          <p:cNvPr id="89" name="Shape 87"/>
           <p:cNvSpPr/>
           <p:nvPr/>
         </p:nvSpPr>
@@ -3606,7 +3739,7 @@
       </p:sp>
       <p:sp>
         <p:nvSpPr>
-          <p:cNvPr id="86" name="Text 84"/>
+          <p:cNvPr id="90" name="Text 88"/>
           <p:cNvSpPr/>
           <p:nvPr/>
         </p:nvSpPr>
@@ -3642,7 +3775,7 @@
       </p:sp>
       <p:sp>
         <p:nvSpPr>
-          <p:cNvPr id="87" name="Text 85"/>
+          <p:cNvPr id="91" name="Text 89"/>
           <p:cNvSpPr/>
           <p:nvPr/>
         </p:nvSpPr>
@@ -3670,7 +3803,7 @@
                   <a:srgbClr val="D97706"/>
                 </a:solidFill>
               </a:rPr>
-              <a:t>1042.5h</a:t>
+              <a:t>1057.5h</a:t>
             </a:r>
             <a:endParaRPr lang="en-US" sz="2400" dirty="0"/>
           </a:p>
@@ -3678,7 +3811,7 @@
       </p:sp>
       <p:sp>
         <p:nvSpPr>
-          <p:cNvPr id="88" name="Text 86"/>
+          <p:cNvPr id="92" name="Text 90"/>
           <p:cNvSpPr/>
           <p:nvPr/>
         </p:nvSpPr>
@@ -3714,7 +3847,7 @@
       </p:sp>
       <p:sp>
         <p:nvSpPr>
-          <p:cNvPr id="89" name="Shape 87"/>
+          <p:cNvPr id="93" name="Shape 91"/>
           <p:cNvSpPr/>
           <p:nvPr/>
         </p:nvSpPr>
@@ -3739,7 +3872,7 @@
       </p:sp>
       <p:sp>
         <p:nvSpPr>
-          <p:cNvPr id="90" name="Text 88"/>
+          <p:cNvPr id="94" name="Text 92"/>
           <p:cNvSpPr/>
           <p:nvPr/>
         </p:nvSpPr>
@@ -3775,7 +3908,7 @@
       </p:sp>
       <p:sp>
         <p:nvSpPr>
-          <p:cNvPr id="91" name="Text 89"/>
+          <p:cNvPr id="95" name="Text 93"/>
           <p:cNvSpPr/>
           <p:nvPr/>
         </p:nvSpPr>
@@ -3803,7 +3936,7 @@
                   <a:srgbClr val="F87171"/>
                 </a:solidFill>
               </a:rPr>
-              <a:t>342.5h</a:t>
+              <a:t>322.5h</a:t>
             </a:r>
             <a:endParaRPr lang="en-US" sz="2400" dirty="0"/>
           </a:p>
@@ -3811,7 +3944,7 @@
       </p:sp>
       <p:sp>
         <p:nvSpPr>
-          <p:cNvPr id="92" name="Text 90"/>
+          <p:cNvPr id="96" name="Text 94"/>
           <p:cNvSpPr/>
           <p:nvPr/>
         </p:nvSpPr>
@@ -3847,7 +3980,7 @@
       </p:sp>
       <p:sp>
         <p:nvSpPr>
-          <p:cNvPr id="93" name="Shape 91"/>
+          <p:cNvPr id="97" name="Shape 95"/>
           <p:cNvSpPr/>
           <p:nvPr/>
         </p:nvSpPr>
@@ -3872,7 +4005,7 @@
       </p:sp>
       <p:sp>
         <p:nvSpPr>
-          <p:cNvPr id="94" name="Text 92"/>
+          <p:cNvPr id="98" name="Text 96"/>
           <p:cNvSpPr/>
           <p:nvPr/>
         </p:nvSpPr>
@@ -3908,7 +4041,7 @@
       </p:sp>
       <p:sp>
         <p:nvSpPr>
-          <p:cNvPr id="95" name="Text 93"/>
+          <p:cNvPr id="99" name="Text 97"/>
           <p:cNvSpPr/>
           <p:nvPr/>
         </p:nvSpPr>
@@ -3936,7 +4069,7 @@
                   <a:srgbClr val="D97706"/>
                 </a:solidFill>
               </a:rPr>
-              <a:t>+177.5h</a:t>
+              <a:t>+172.5h</a:t>
             </a:r>
             <a:endParaRPr lang="en-US" sz="2400" dirty="0"/>
           </a:p>
@@ -3944,7 +4077,7 @@
       </p:sp>
       <p:sp>
         <p:nvSpPr>
-          <p:cNvPr id="96" name="Text 94"/>
+          <p:cNvPr id="100" name="Text 98"/>
           <p:cNvSpPr/>
           <p:nvPr/>
         </p:nvSpPr>
@@ -3972,7 +4105,7 @@
                   <a:srgbClr val="888888"/>
                 </a:solidFill>
               </a:rPr>
-              <a:t>projetado: 1385h (+15%)</a:t>
+              <a:t>projetado: 1380h (+14%)</a:t>
             </a:r>
             <a:endParaRPr lang="en-US" sz="700" dirty="0"/>
           </a:p>
@@ -3980,14 +4113,14 @@
       </p:sp>
       <p:sp>
         <p:nvSpPr>
-          <p:cNvPr id="97" name="Shape 95"/>
+          <p:cNvPr id="101" name="Shape 99"/>
           <p:cNvSpPr/>
           <p:nvPr/>
         </p:nvSpPr>
         <p:spPr>
           <a:xfrm>
             <a:off x="2441448" y="2916936"/>
-            <a:ext cx="7261310" cy="54864"/>
+            <a:ext cx="7392477" cy="54864"/>
           </a:xfrm>
           <a:prstGeom prst="rect">
             <a:avLst/>
@@ -4005,14 +4138,14 @@
       </p:sp>
       <p:sp>
         <p:nvSpPr>
-          <p:cNvPr id="98" name="Shape 96"/>
-          <p:cNvSpPr/>
-          <p:nvPr/>
-        </p:nvSpPr>
-        <p:spPr>
-          <a:xfrm>
-            <a:off x="9702758" y="2916936"/>
-            <a:ext cx="2385610" cy="54864"/>
+          <p:cNvPr id="102" name="Shape 100"/>
+          <p:cNvSpPr/>
+          <p:nvPr/>
+        </p:nvSpPr>
+        <p:spPr>
+          <a:xfrm>
+            <a:off x="9833925" y="2916936"/>
+            <a:ext cx="2254443" cy="54864"/>
           </a:xfrm>
           <a:prstGeom prst="rect">
             <a:avLst/>
@@ -4030,7 +4163,7 @@
       </p:sp>
       <p:sp>
         <p:nvSpPr>
-          <p:cNvPr id="99" name="Shape 97"/>
+          <p:cNvPr id="103" name="Shape 101"/>
           <p:cNvSpPr/>
           <p:nvPr/>
         </p:nvSpPr>
@@ -4062,7 +4195,7 @@
       </p:sp>
       <p:sp>
         <p:nvSpPr>
-          <p:cNvPr id="100" name="Text 98"/>
+          <p:cNvPr id="104" name="Text 102"/>
           <p:cNvSpPr/>
           <p:nvPr/>
         </p:nvSpPr>
@@ -4098,7 +4231,7 @@
       </p:sp>
       <p:sp>
         <p:nvSpPr>
-          <p:cNvPr id="101" name="Shape 99"/>
+          <p:cNvPr id="105" name="Shape 103"/>
           <p:cNvSpPr/>
           <p:nvPr/>
         </p:nvSpPr>
@@ -4125,7 +4258,7 @@
       </p:sp>
       <p:sp>
         <p:nvSpPr>
-          <p:cNvPr id="102" name="Text 100"/>
+          <p:cNvPr id="106" name="Text 104"/>
           <p:cNvSpPr/>
           <p:nvPr/>
         </p:nvSpPr>
@@ -4153,7 +4286,7 @@
                   <a:srgbClr val="0F6E56"/>
                 </a:solidFill>
               </a:rPr>
-              <a:t>85% concluido</a:t>
+              <a:t>86% concluido</a:t>
             </a:r>
             <a:endParaRPr lang="en-US" sz="650" dirty="0"/>
           </a:p>
@@ -4161,7 +4294,7 @@
       </p:sp>
       <p:sp>
         <p:nvSpPr>
-          <p:cNvPr id="103" name="Shape 101"/>
+          <p:cNvPr id="107" name="Shape 105"/>
           <p:cNvSpPr/>
           <p:nvPr/>
         </p:nvSpPr>
@@ -4186,14 +4319,14 @@
       </p:sp>
       <p:sp>
         <p:nvSpPr>
-          <p:cNvPr id="104" name="Shape 102"/>
+          <p:cNvPr id="108" name="Shape 106"/>
           <p:cNvSpPr/>
           <p:nvPr/>
         </p:nvSpPr>
         <p:spPr>
           <a:xfrm>
             <a:off x="2551176" y="3291840"/>
-            <a:ext cx="3874541" cy="64008"/>
+            <a:ext cx="3920124" cy="64008"/>
           </a:xfrm>
           <a:prstGeom prst="rect">
             <a:avLst/>
@@ -4211,7 +4344,7 @@
       </p:sp>
       <p:sp>
         <p:nvSpPr>
-          <p:cNvPr id="105" name="Shape 103"/>
+          <p:cNvPr id="109" name="Shape 107"/>
           <p:cNvSpPr/>
           <p:nvPr/>
         </p:nvSpPr>
@@ -4236,7 +4369,7 @@
       </p:sp>
       <p:sp>
         <p:nvSpPr>
-          <p:cNvPr id="106" name="Text 104"/>
+          <p:cNvPr id="110" name="Text 108"/>
           <p:cNvSpPr/>
           <p:nvPr/>
         </p:nvSpPr>
@@ -4272,7 +4405,7 @@
       </p:sp>
       <p:sp>
         <p:nvSpPr>
-          <p:cNvPr id="107" name="Text 105"/>
+          <p:cNvPr id="111" name="Text 109"/>
           <p:cNvSpPr/>
           <p:nvPr/>
         </p:nvSpPr>
@@ -4300,7 +4433,7 @@
                   <a:srgbClr val="1D9E75"/>
                 </a:solidFill>
               </a:rPr>
-              <a:t>12/06/2026</a:t>
+              <a:t>11/06/2026</a:t>
             </a:r>
             <a:endParaRPr lang="en-US" sz="1050" dirty="0"/>
           </a:p>
@@ -4308,7 +4441,7 @@
       </p:sp>
       <p:sp>
         <p:nvSpPr>
-          <p:cNvPr id="108" name="Shape 106"/>
+          <p:cNvPr id="112" name="Shape 110"/>
           <p:cNvSpPr/>
           <p:nvPr/>
         </p:nvSpPr>
@@ -4333,7 +4466,7 @@
       </p:sp>
       <p:sp>
         <p:nvSpPr>
-          <p:cNvPr id="109" name="Text 107"/>
+          <p:cNvPr id="113" name="Text 111"/>
           <p:cNvSpPr/>
           <p:nvPr/>
         </p:nvSpPr>
@@ -4369,7 +4502,7 @@
       </p:sp>
       <p:sp>
         <p:nvSpPr>
-          <p:cNvPr id="110" name="Text 108"/>
+          <p:cNvPr id="114" name="Text 112"/>
           <p:cNvSpPr/>
           <p:nvPr/>
         </p:nvSpPr>
@@ -4405,7 +4538,7 @@
       </p:sp>
       <p:sp>
         <p:nvSpPr>
-          <p:cNvPr id="111" name="Shape 109"/>
+          <p:cNvPr id="115" name="Shape 113"/>
           <p:cNvSpPr/>
           <p:nvPr/>
         </p:nvSpPr>
@@ -4430,7 +4563,7 @@
       </p:sp>
       <p:sp>
         <p:nvSpPr>
-          <p:cNvPr id="112" name="Text 110"/>
+          <p:cNvPr id="116" name="Text 114"/>
           <p:cNvSpPr/>
           <p:nvPr/>
         </p:nvSpPr>
@@ -4466,7 +4599,7 @@
       </p:sp>
       <p:sp>
         <p:nvSpPr>
-          <p:cNvPr id="113" name="Text 111"/>
+          <p:cNvPr id="117" name="Text 115"/>
           <p:cNvSpPr/>
           <p:nvPr/>
         </p:nvSpPr>
@@ -4502,7 +4635,7 @@
       </p:sp>
       <p:sp>
         <p:nvSpPr>
-          <p:cNvPr id="114" name="Shape 112"/>
+          <p:cNvPr id="118" name="Shape 116"/>
           <p:cNvSpPr/>
           <p:nvPr/>
         </p:nvSpPr>
@@ -4534,7 +4667,7 @@
       </p:sp>
       <p:sp>
         <p:nvSpPr>
-          <p:cNvPr id="115" name="Text 113"/>
+          <p:cNvPr id="119" name="Text 117"/>
           <p:cNvSpPr/>
           <p:nvPr/>
         </p:nvSpPr>
@@ -4570,7 +4703,7 @@
       </p:sp>
       <p:sp>
         <p:nvSpPr>
-          <p:cNvPr id="116" name="Shape 114"/>
+          <p:cNvPr id="120" name="Shape 118"/>
           <p:cNvSpPr/>
           <p:nvPr/>
         </p:nvSpPr>
@@ -4597,7 +4730,7 @@
       </p:sp>
       <p:sp>
         <p:nvSpPr>
-          <p:cNvPr id="117" name="Text 115"/>
+          <p:cNvPr id="121" name="Text 119"/>
           <p:cNvSpPr/>
           <p:nvPr/>
         </p:nvSpPr>
@@ -4625,7 +4758,7 @@
                   <a:srgbClr val="991B1B"/>
                 </a:solidFill>
               </a:rPr>
-              <a:t>40% concluido</a:t>
+              <a:t>46% concluido</a:t>
             </a:r>
             <a:endParaRPr lang="en-US" sz="650" dirty="0"/>
           </a:p>
@@ -4633,7 +4766,7 @@
       </p:sp>
       <p:sp>
         <p:nvSpPr>
-          <p:cNvPr id="118" name="Shape 116"/>
+          <p:cNvPr id="122" name="Shape 120"/>
           <p:cNvSpPr/>
           <p:nvPr/>
         </p:nvSpPr>
@@ -4658,14 +4791,14 @@
       </p:sp>
       <p:sp>
         <p:nvSpPr>
-          <p:cNvPr id="119" name="Shape 117"/>
+          <p:cNvPr id="123" name="Shape 121"/>
           <p:cNvSpPr/>
           <p:nvPr/>
         </p:nvSpPr>
         <p:spPr>
           <a:xfrm>
             <a:off x="7420356" y="3291840"/>
-            <a:ext cx="1823314" cy="64008"/>
+            <a:ext cx="2096811" cy="64008"/>
           </a:xfrm>
           <a:prstGeom prst="rect">
             <a:avLst/>
@@ -4683,7 +4816,7 @@
       </p:sp>
       <p:sp>
         <p:nvSpPr>
-          <p:cNvPr id="120" name="Shape 118"/>
+          <p:cNvPr id="124" name="Shape 122"/>
           <p:cNvSpPr/>
           <p:nvPr/>
         </p:nvSpPr>
@@ -4708,7 +4841,7 @@
       </p:sp>
       <p:sp>
         <p:nvSpPr>
-          <p:cNvPr id="121" name="Text 119"/>
+          <p:cNvPr id="125" name="Text 123"/>
           <p:cNvSpPr/>
           <p:nvPr/>
         </p:nvSpPr>
@@ -4744,7 +4877,7 @@
       </p:sp>
       <p:sp>
         <p:nvSpPr>
-          <p:cNvPr id="122" name="Text 120"/>
+          <p:cNvPr id="126" name="Text 124"/>
           <p:cNvSpPr/>
           <p:nvPr/>
         </p:nvSpPr>
@@ -4780,7 +4913,7 @@
       </p:sp>
       <p:sp>
         <p:nvSpPr>
-          <p:cNvPr id="123" name="Shape 121"/>
+          <p:cNvPr id="127" name="Shape 125"/>
           <p:cNvSpPr/>
           <p:nvPr/>
         </p:nvSpPr>
@@ -4805,7 +4938,7 @@
       </p:sp>
       <p:sp>
         <p:nvSpPr>
-          <p:cNvPr id="124" name="Text 122"/>
+          <p:cNvPr id="128" name="Text 126"/>
           <p:cNvSpPr/>
           <p:nvPr/>
         </p:nvSpPr>
@@ -4841,7 +4974,7 @@
       </p:sp>
       <p:sp>
         <p:nvSpPr>
-          <p:cNvPr id="125" name="Text 123"/>
+          <p:cNvPr id="129" name="Text 127"/>
           <p:cNvSpPr/>
           <p:nvPr/>
         </p:nvSpPr>
@@ -4877,7 +5010,7 @@
       </p:sp>
       <p:sp>
         <p:nvSpPr>
-          <p:cNvPr id="126" name="Shape 124"/>
+          <p:cNvPr id="130" name="Shape 128"/>
           <p:cNvSpPr/>
           <p:nvPr/>
         </p:nvSpPr>
@@ -4902,7 +5035,7 @@
       </p:sp>
       <p:sp>
         <p:nvSpPr>
-          <p:cNvPr id="127" name="Text 125"/>
+          <p:cNvPr id="131" name="Text 129"/>
           <p:cNvSpPr/>
           <p:nvPr/>
         </p:nvSpPr>
@@ -4938,7 +5071,7 @@
       </p:sp>
       <p:sp>
         <p:nvSpPr>
-          <p:cNvPr id="128" name="Text 126"/>
+          <p:cNvPr id="132" name="Text 130"/>
           <p:cNvSpPr/>
           <p:nvPr/>
         </p:nvSpPr>
@@ -4974,7 +5107,7 @@
       </p:sp>
       <p:sp>
         <p:nvSpPr>
-          <p:cNvPr id="129" name="Shape 127"/>
+          <p:cNvPr id="133" name="Shape 131"/>
           <p:cNvSpPr/>
           <p:nvPr/>
         </p:nvSpPr>
@@ -5006,7 +5139,7 @@
       </p:sp>
       <p:sp>
         <p:nvSpPr>
-          <p:cNvPr id="130" name="Text 128"/>
+          <p:cNvPr id="134" name="Text 132"/>
           <p:cNvSpPr/>
           <p:nvPr/>
         </p:nvSpPr>
@@ -5042,7 +5175,7 @@
       </p:sp>
       <p:sp>
         <p:nvSpPr>
-          <p:cNvPr id="131" name="Text 129"/>
+          <p:cNvPr id="135" name="Text 133"/>
           <p:cNvSpPr/>
           <p:nvPr/>
         </p:nvSpPr>
@@ -5070,7 +5203,7 @@
                   <a:srgbClr val="D85A30"/>
                 </a:solidFill>
               </a:rPr>
-              <a:t>19.9%</a:t>
+              <a:t>19.7%</a:t>
             </a:r>
             <a:endParaRPr lang="en-US" sz="2200" dirty="0"/>
           </a:p>
@@ -5078,7 +5211,7 @@
       </p:sp>
       <p:sp>
         <p:nvSpPr>
-          <p:cNvPr id="132" name="Text 130"/>
+          <p:cNvPr id="136" name="Text 134"/>
           <p:cNvSpPr/>
           <p:nvPr/>
         </p:nvSpPr>
@@ -5114,7 +5247,7 @@
       </p:sp>
       <p:sp>
         <p:nvSpPr>
-          <p:cNvPr id="133" name="Text 131"/>
+          <p:cNvPr id="137" name="Text 135"/>
           <p:cNvSpPr/>
           <p:nvPr/>
         </p:nvSpPr>
@@ -5150,7 +5283,7 @@
       </p:sp>
       <p:sp>
         <p:nvSpPr>
-          <p:cNvPr id="134" name="Shape 132"/>
+          <p:cNvPr id="138" name="Shape 136"/>
           <p:cNvSpPr/>
           <p:nvPr/>
         </p:nvSpPr>
@@ -5175,7 +5308,7 @@
       </p:sp>
       <p:sp>
         <p:nvSpPr>
-          <p:cNvPr id="135" name="Text 133"/>
+          <p:cNvPr id="139" name="Text 137"/>
           <p:cNvSpPr/>
           <p:nvPr/>
         </p:nvSpPr>
@@ -5203,7 +5336,7 @@
                   <a:srgbClr val="534AB7"/>
                 </a:solidFill>
               </a:rPr>
-              <a:t>8.8%</a:t>
+              <a:t>8.4%</a:t>
             </a:r>
             <a:endParaRPr lang="en-US" sz="2200" dirty="0"/>
           </a:p>
@@ -5211,7 +5344,7 @@
       </p:sp>
       <p:sp>
         <p:nvSpPr>
-          <p:cNvPr id="136" name="Text 134"/>
+          <p:cNvPr id="140" name="Text 138"/>
           <p:cNvSpPr/>
           <p:nvPr/>
         </p:nvSpPr>
@@ -5247,7 +5380,7 @@
       </p:sp>
       <p:sp>
         <p:nvSpPr>
-          <p:cNvPr id="137" name="Text 135"/>
+          <p:cNvPr id="141" name="Text 139"/>
           <p:cNvSpPr/>
           <p:nvPr/>
         </p:nvSpPr>
@@ -5283,7 +5416,7 @@
       </p:sp>
       <p:sp>
         <p:nvSpPr>
-          <p:cNvPr id="138" name="Shape 136"/>
+          <p:cNvPr id="142" name="Shape 140"/>
           <p:cNvSpPr/>
           <p:nvPr/>
         </p:nvSpPr>
@@ -5308,7 +5441,7 @@
       </p:sp>
       <p:sp>
         <p:nvSpPr>
-          <p:cNvPr id="139" name="Text 137"/>
+          <p:cNvPr id="143" name="Text 141"/>
           <p:cNvSpPr/>
           <p:nvPr/>
         </p:nvSpPr>
@@ -5336,7 +5469,7 @@
                   <a:srgbClr val="1D9E75"/>
                 </a:solidFill>
               </a:rPr>
-              <a:t>80.1%</a:t>
+              <a:t>80.3%</a:t>
             </a:r>
             <a:endParaRPr lang="en-US" sz="2200" dirty="0"/>
           </a:p>
@@ -5344,7 +5477,7 @@
       </p:sp>
       <p:sp>
         <p:nvSpPr>
-          <p:cNvPr id="140" name="Text 138"/>
+          <p:cNvPr id="144" name="Text 142"/>
           <p:cNvSpPr/>
           <p:nvPr/>
         </p:nvSpPr>
@@ -5380,7 +5513,7 @@
       </p:sp>
       <p:sp>
         <p:nvSpPr>
-          <p:cNvPr id="141" name="Text 139"/>
+          <p:cNvPr id="145" name="Text 143"/>
           <p:cNvSpPr/>
           <p:nvPr/>
         </p:nvSpPr>
@@ -5416,7 +5549,7 @@
       </p:sp>
       <p:sp>
         <p:nvSpPr>
-          <p:cNvPr id="142" name="Text 140"/>
+          <p:cNvPr id="146" name="Text 144"/>
           <p:cNvSpPr/>
           <p:nvPr/>
         </p:nvSpPr>
@@ -5452,7 +5585,7 @@
       </p:sp>
       <p:sp>
         <p:nvSpPr>
-          <p:cNvPr id="143" name="Shape 141"/>
+          <p:cNvPr id="147" name="Shape 145"/>
           <p:cNvSpPr/>
           <p:nvPr/>
         </p:nvSpPr>
@@ -5465,11 +5598,11 @@
             <a:avLst/>
           </a:prstGeom>
           <a:solidFill>
-            <a:srgbClr val="F5F3FF"/>
-          </a:solidFill>
-          <a:ln w="12700">
-            <a:solidFill>
-              <a:srgbClr val="6B3FA0"/>
+            <a:srgbClr val="FFF1F2"/>
+          </a:solidFill>
+          <a:ln w="12700">
+            <a:solidFill>
+              <a:srgbClr val="DC2626"/>
             </a:solidFill>
             <a:prstDash val="solid"/>
           </a:ln>
@@ -5484,7 +5617,7 @@
       </p:sp>
       <p:sp>
         <p:nvSpPr>
-          <p:cNvPr id="144" name="Text 142"/>
+          <p:cNvPr id="148" name="Text 146"/>
           <p:cNvSpPr/>
           <p:nvPr/>
         </p:nvSpPr>
@@ -5509,10 +5642,10 @@
             <a:r>
               <a:rPr lang="en-US" sz="700" b="1" dirty="0">
                 <a:solidFill>
-                  <a:srgbClr val="6B3FA0"/>
-                </a:solidFill>
-              </a:rPr>
-              <a:t>REFINAMENTO PENDENTE</a:t>
+                  <a:srgbClr val="DC2626"/>
+                </a:solidFill>
+              </a:rPr>
+              <a:t>RISCO ATIVO</a:t>
             </a:r>
             <a:endParaRPr lang="en-US" sz="700" dirty="0"/>
           </a:p>
@@ -5520,7 +5653,7 @@
       </p:sp>
       <p:sp>
         <p:nvSpPr>
-          <p:cNvPr id="145" name="Shape 143"/>
+          <p:cNvPr id="149" name="Shape 147"/>
           <p:cNvSpPr/>
           <p:nvPr/>
         </p:nvSpPr>
@@ -5533,19 +5666,19 @@
             <a:avLst/>
           </a:prstGeom>
           <a:solidFill>
-            <a:srgbClr val="6B3FA0"/>
-          </a:solidFill>
-          <a:ln w="12700">
-            <a:solidFill>
-              <a:srgbClr val="6B3FA0"/>
-            </a:solidFill>
-            <a:prstDash val="solid"/>
-          </a:ln>
-        </p:spPr>
-      </p:sp>
-      <p:sp>
-        <p:nvSpPr>
-          <p:cNvPr id="146" name="Text 144"/>
+            <a:srgbClr val="DC2626"/>
+          </a:solidFill>
+          <a:ln w="12700">
+            <a:solidFill>
+              <a:srgbClr val="DC2626"/>
+            </a:solidFill>
+            <a:prstDash val="solid"/>
+          </a:ln>
+        </p:spPr>
+      </p:sp>
+      <p:sp>
+        <p:nvSpPr>
+          <p:cNvPr id="150" name="Text 148"/>
           <p:cNvSpPr/>
           <p:nvPr/>
         </p:nvSpPr>
@@ -5587,7 +5720,7 @@
                   <a:srgbClr val="FFFFFF"/>
                 </a:solidFill>
               </a:rPr>
-              <a:t>story</a:t>
+              <a:t>estouros</a:t>
             </a:r>
             <a:endParaRPr lang="en-US" sz="650" dirty="0"/>
           </a:p>
@@ -5595,7 +5728,7 @@
       </p:sp>
       <p:sp>
         <p:nvSpPr>
-          <p:cNvPr id="147" name="Text 145"/>
+          <p:cNvPr id="151" name="Text 149"/>
           <p:cNvSpPr/>
           <p:nvPr/>
         </p:nvSpPr>
@@ -5623,7 +5756,7 @@
                   <a:srgbClr val="222222"/>
                 </a:solidFill>
               </a:rPr>
-              <a:t>1 story sem subtarefas</a:t>
+              <a:t>#404993 +3h(+75%) [artursilva frwk.com.br]</a:t>
             </a:r>
             <a:endParaRPr lang="en-US" sz="750" dirty="0"/>
           </a:p>
@@ -5631,7 +5764,7 @@
       </p:sp>
       <p:sp>
         <p:nvSpPr>
-          <p:cNvPr id="148" name="Text 146"/>
+          <p:cNvPr id="152" name="Text 150"/>
           <p:cNvSpPr/>
           <p:nvPr/>
         </p:nvSpPr>
@@ -5653,21 +5786,13 @@
             <a:pPr algn="l" indent="0" marL="0">
               <a:buNone/>
             </a:pPr>
-            <a:r>
-              <a:rPr lang="en-US" sz="750" dirty="0">
-                <a:solidFill>
-                  <a:srgbClr val="222222"/>
-                </a:solidFill>
-              </a:rPr>
-              <a:t>Redundante</a:t>
-            </a:r>
             <a:endParaRPr lang="en-US" sz="750" dirty="0"/>
           </a:p>
         </p:txBody>
       </p:sp>
       <p:sp>
         <p:nvSpPr>
-          <p:cNvPr id="149" name="Shape 147"/>
+          <p:cNvPr id="153" name="Shape 151"/>
           <p:cNvSpPr/>
           <p:nvPr/>
         </p:nvSpPr>
@@ -5699,7 +5824,7 @@
       </p:sp>
       <p:sp>
         <p:nvSpPr>
-          <p:cNvPr id="150" name="Text 148"/>
+          <p:cNvPr id="154" name="Text 152"/>
           <p:cNvSpPr/>
           <p:nvPr/>
         </p:nvSpPr>
@@ -5735,7 +5860,7 @@
       </p:sp>
       <p:sp>
         <p:nvSpPr>
-          <p:cNvPr id="151" name="Shape 149"/>
+          <p:cNvPr id="155" name="Shape 153"/>
           <p:cNvSpPr/>
           <p:nvPr/>
         </p:nvSpPr>
@@ -5760,7 +5885,7 @@
       </p:sp>
       <p:sp>
         <p:nvSpPr>
-          <p:cNvPr id="152" name="Text 150"/>
+          <p:cNvPr id="156" name="Text 154"/>
           <p:cNvSpPr/>
           <p:nvPr/>
         </p:nvSpPr>
@@ -5810,7 +5935,7 @@
       </p:sp>
       <p:sp>
         <p:nvSpPr>
-          <p:cNvPr id="153" name="Text 151"/>
+          <p:cNvPr id="157" name="Text 155"/>
           <p:cNvSpPr/>
           <p:nvPr/>
         </p:nvSpPr>
@@ -5846,7 +5971,7 @@
       </p:sp>
       <p:sp>
         <p:nvSpPr>
-          <p:cNvPr id="154" name="Text 152"/>
+          <p:cNvPr id="158" name="Text 156"/>
           <p:cNvSpPr/>
           <p:nvPr/>
         </p:nvSpPr>
@@ -5874,7 +5999,7 @@
       </p:sp>
       <p:sp>
         <p:nvSpPr>
-          <p:cNvPr id="155" name="Shape 153"/>
+          <p:cNvPr id="159" name="Shape 157"/>
           <p:cNvSpPr/>
           <p:nvPr/>
         </p:nvSpPr>
@@ -5906,7 +6031,7 @@
       </p:sp>
       <p:sp>
         <p:nvSpPr>
-          <p:cNvPr id="156" name="Text 154"/>
+          <p:cNvPr id="160" name="Text 158"/>
           <p:cNvSpPr/>
           <p:nvPr/>
         </p:nvSpPr>
@@ -5942,7 +6067,7 @@
       </p:sp>
       <p:sp>
         <p:nvSpPr>
-          <p:cNvPr id="157" name="Shape 155"/>
+          <p:cNvPr id="161" name="Shape 159"/>
           <p:cNvSpPr/>
           <p:nvPr/>
         </p:nvSpPr>
@@ -5967,7 +6092,7 @@
       </p:sp>
       <p:sp>
         <p:nvSpPr>
-          <p:cNvPr id="158" name="Text 156"/>
+          <p:cNvPr id="162" name="Text 160"/>
           <p:cNvSpPr/>
           <p:nvPr/>
         </p:nvSpPr>
@@ -6017,7 +6142,7 @@
       </p:sp>
       <p:sp>
         <p:nvSpPr>
-          <p:cNvPr id="159" name="Text 157"/>
+          <p:cNvPr id="163" name="Text 161"/>
           <p:cNvSpPr/>
           <p:nvPr/>
         </p:nvSpPr>
@@ -6053,7 +6178,7 @@
       </p:sp>
       <p:sp>
         <p:nvSpPr>
-          <p:cNvPr id="160" name="Text 158"/>
+          <p:cNvPr id="164" name="Text 162"/>
           <p:cNvSpPr/>
           <p:nvPr/>
         </p:nvSpPr>
@@ -6089,7 +6214,7 @@
       </p:sp>
       <p:sp>
         <p:nvSpPr>
-          <p:cNvPr id="161" name="Shape 159"/>
+          <p:cNvPr id="165" name="Shape 163"/>
           <p:cNvSpPr/>
           <p:nvPr/>
         </p:nvSpPr>
@@ -6121,7 +6246,7 @@
       </p:sp>
       <p:sp>
         <p:nvSpPr>
-          <p:cNvPr id="162" name="Text 160"/>
+          <p:cNvPr id="166" name="Text 164"/>
           <p:cNvSpPr/>
           <p:nvPr/>
         </p:nvSpPr>
@@ -6157,7 +6282,7 @@
       </p:sp>
       <p:sp>
         <p:nvSpPr>
-          <p:cNvPr id="163" name="Shape 161"/>
+          <p:cNvPr id="167" name="Shape 165"/>
           <p:cNvSpPr/>
           <p:nvPr/>
         </p:nvSpPr>
@@ -6182,7 +6307,7 @@
       </p:sp>
       <p:sp>
         <p:nvSpPr>
-          <p:cNvPr id="164" name="Text 162"/>
+          <p:cNvPr id="168" name="Text 166"/>
           <p:cNvSpPr/>
           <p:nvPr/>
         </p:nvSpPr>
@@ -6232,7 +6357,7 @@
       </p:sp>
       <p:sp>
         <p:nvSpPr>
-          <p:cNvPr id="165" name="Text 163"/>
+          <p:cNvPr id="169" name="Text 167"/>
           <p:cNvSpPr/>
           <p:nvPr/>
         </p:nvSpPr>
@@ -6268,7 +6393,7 @@
       </p:sp>
       <p:sp>
         <p:nvSpPr>
-          <p:cNvPr id="166" name="Text 164"/>
+          <p:cNvPr id="170" name="Text 168"/>
           <p:cNvSpPr/>
           <p:nvPr/>
         </p:nvSpPr>
@@ -6304,7 +6429,7 @@
       </p:sp>
       <p:sp>
         <p:nvSpPr>
-          <p:cNvPr id="167" name="Shape 165"/>
+          <p:cNvPr id="171" name="Shape 169"/>
           <p:cNvSpPr/>
           <p:nvPr/>
         </p:nvSpPr>
@@ -6329,7 +6454,7 @@
       </p:sp>
       <p:sp>
         <p:nvSpPr>
-          <p:cNvPr id="168" name="Text 166"/>
+          <p:cNvPr id="172" name="Text 170"/>
           <p:cNvSpPr/>
           <p:nvPr/>
         </p:nvSpPr>
@@ -6365,7 +6490,7 @@
       </p:sp>
       <p:sp>
         <p:nvSpPr>
-          <p:cNvPr id="169" name="Shape 167"/>
+          <p:cNvPr id="173" name="Shape 171"/>
           <p:cNvSpPr/>
           <p:nvPr/>
         </p:nvSpPr>
@@ -6390,7 +6515,7 @@
       </p:sp>
       <p:sp>
         <p:nvSpPr>
-          <p:cNvPr id="170" name="Text 168"/>
+          <p:cNvPr id="174" name="Text 172"/>
           <p:cNvSpPr/>
           <p:nvPr/>
         </p:nvSpPr>
@@ -6426,7 +6551,7 @@
       </p:sp>
       <p:sp>
         <p:nvSpPr>
-          <p:cNvPr id="171" name="Shape 169"/>
+          <p:cNvPr id="175" name="Shape 173"/>
           <p:cNvSpPr/>
           <p:nvPr/>
         </p:nvSpPr>
@@ -6458,7 +6583,7 @@
       </p:sp>
       <p:sp>
         <p:nvSpPr>
-          <p:cNvPr id="172" name="Text 170"/>
+          <p:cNvPr id="176" name="Text 174"/>
           <p:cNvSpPr/>
           <p:nvPr/>
         </p:nvSpPr>
@@ -6494,7 +6619,7 @@
       </p:sp>
       <p:sp>
         <p:nvSpPr>
-          <p:cNvPr id="173" name="Shape 171"/>
+          <p:cNvPr id="177" name="Shape 175"/>
           <p:cNvSpPr/>
           <p:nvPr/>
         </p:nvSpPr>
@@ -6519,14 +6644,14 @@
       </p:sp>
       <p:sp>
         <p:nvSpPr>
-          <p:cNvPr id="174" name="Shape 172"/>
+          <p:cNvPr id="178" name="Shape 176"/>
           <p:cNvSpPr/>
           <p:nvPr/>
         </p:nvSpPr>
         <p:spPr>
           <a:xfrm>
             <a:off x="2496312" y="6153912"/>
-            <a:ext cx="1163942" cy="73152"/>
+            <a:ext cx="1137108" cy="73152"/>
           </a:xfrm>
           <a:prstGeom prst="rect">
             <a:avLst/>
@@ -6544,7 +6669,7 @@
       </p:sp>
       <p:sp>
         <p:nvSpPr>
-          <p:cNvPr id="175" name="Text 173"/>
+          <p:cNvPr id="179" name="Text 177"/>
           <p:cNvSpPr/>
           <p:nvPr/>
         </p:nvSpPr>
@@ -6580,7 +6705,7 @@
       </p:sp>
       <p:sp>
         <p:nvSpPr>
-          <p:cNvPr id="176" name="Text 174"/>
+          <p:cNvPr id="180" name="Text 178"/>
           <p:cNvSpPr/>
           <p:nvPr/>
         </p:nvSpPr>
@@ -6608,7 +6733,7 @@
                   <a:srgbClr val="888888"/>
                 </a:solidFill>
               </a:rPr>
-              <a:t>169.5h estimadas</a:t>
+              <a:t>173.5h estimadas</a:t>
             </a:r>
             <a:endParaRPr lang="en-US" sz="850" dirty="0"/>
           </a:p>
@@ -6616,7 +6741,7 @@
       </p:sp>
       <p:sp>
         <p:nvSpPr>
-          <p:cNvPr id="177" name="Shape 175"/>
+          <p:cNvPr id="181" name="Shape 179"/>
           <p:cNvSpPr/>
           <p:nvPr/>
         </p:nvSpPr>
@@ -6648,7 +6773,7 @@
       </p:sp>
       <p:sp>
         <p:nvSpPr>
-          <p:cNvPr id="178" name="Text 176"/>
+          <p:cNvPr id="182" name="Text 180"/>
           <p:cNvSpPr/>
           <p:nvPr/>
         </p:nvSpPr>
@@ -6684,7 +6809,7 @@
       </p:sp>
       <p:sp>
         <p:nvSpPr>
-          <p:cNvPr id="179" name="Shape 177"/>
+          <p:cNvPr id="183" name="Shape 181"/>
           <p:cNvSpPr/>
           <p:nvPr/>
         </p:nvSpPr>
@@ -6709,7 +6834,7 @@
       </p:sp>
       <p:sp>
         <p:nvSpPr>
-          <p:cNvPr id="180" name="Shape 178"/>
+          <p:cNvPr id="184" name="Shape 182"/>
           <p:cNvSpPr/>
           <p:nvPr/>
         </p:nvSpPr>
@@ -6734,7 +6859,7 @@
       </p:sp>
       <p:sp>
         <p:nvSpPr>
-          <p:cNvPr id="181" name="Text 179"/>
+          <p:cNvPr id="185" name="Text 183"/>
           <p:cNvSpPr/>
           <p:nvPr/>
         </p:nvSpPr>
@@ -6762,7 +6887,7 @@
                   <a:srgbClr val="D85A30"/>
                 </a:solidFill>
               </a:rPr>
-              <a:t>269.5h · 45 subs finalizadas</a:t>
+              <a:t>275.5h · 45 subs finalizadas</a:t>
             </a:r>
             <a:endParaRPr lang="en-US" sz="950" dirty="0"/>
           </a:p>
@@ -6770,7 +6895,7 @@
       </p:sp>
       <p:sp>
         <p:nvSpPr>
-          <p:cNvPr id="182" name="Text 180"/>
+          <p:cNvPr id="186" name="Text 184"/>
           <p:cNvSpPr/>
           <p:nvPr/>
         </p:nvSpPr>
@@ -6806,7 +6931,7 @@
       </p:sp>
       <p:sp>
         <p:nvSpPr>
-          <p:cNvPr id="183" name="Shape 181"/>
+          <p:cNvPr id="187" name="Shape 185"/>
           <p:cNvSpPr/>
           <p:nvPr/>
         </p:nvSpPr>
@@ -6838,7 +6963,7 @@
       </p:sp>
       <p:sp>
         <p:nvSpPr>
-          <p:cNvPr id="184" name="Text 182"/>
+          <p:cNvPr id="188" name="Text 186"/>
           <p:cNvSpPr/>
           <p:nvPr/>
         </p:nvSpPr>
@@ -6874,7 +6999,7 @@
       </p:sp>
       <p:sp>
         <p:nvSpPr>
-          <p:cNvPr id="185" name="Shape 183"/>
+          <p:cNvPr id="189" name="Shape 187"/>
           <p:cNvSpPr/>
           <p:nvPr/>
         </p:nvSpPr>
@@ -6899,7 +7024,7 @@
       </p:sp>
       <p:sp>
         <p:nvSpPr>
-          <p:cNvPr id="186" name="Shape 184"/>
+          <p:cNvPr id="190" name="Shape 188"/>
           <p:cNvSpPr/>
           <p:nvPr/>
         </p:nvSpPr>
@@ -6924,7 +7049,7 @@
       </p:sp>
       <p:sp>
         <p:nvSpPr>
-          <p:cNvPr id="187" name="Text 185"/>
+          <p:cNvPr id="191" name="Text 189"/>
           <p:cNvSpPr/>
           <p:nvPr/>
         </p:nvSpPr>
@@ -6952,7 +7077,7 @@
                   <a:srgbClr val="D97706"/>
                 </a:solidFill>
               </a:rPr>
-              <a:t>240.7h · 30 subs finalizadas</a:t>
+              <a:t>246.7h · 31 subs finalizadas</a:t>
             </a:r>
             <a:endParaRPr lang="en-US" sz="950" dirty="0"/>
           </a:p>
@@ -6960,7 +7085,7 @@
       </p:sp>
       <p:sp>
         <p:nvSpPr>
-          <p:cNvPr id="188" name="Text 186"/>
+          <p:cNvPr id="192" name="Text 190"/>
           <p:cNvSpPr/>
           <p:nvPr/>
         </p:nvSpPr>
@@ -6996,7 +7121,7 @@
       </p:sp>
       <p:sp>
         <p:nvSpPr>
-          <p:cNvPr id="189" name="Shape 187"/>
+          <p:cNvPr id="193" name="Shape 191"/>
           <p:cNvSpPr/>
           <p:nvPr/>
         </p:nvSpPr>
@@ -7028,7 +7153,7 @@
       </p:sp>
       <p:sp>
         <p:nvSpPr>
-          <p:cNvPr id="190" name="Text 188"/>
+          <p:cNvPr id="194" name="Text 192"/>
           <p:cNvSpPr/>
           <p:nvPr/>
         </p:nvSpPr>
@@ -7064,7 +7189,7 @@
       </p:sp>
       <p:sp>
         <p:nvSpPr>
-          <p:cNvPr id="191" name="Shape 189"/>
+          <p:cNvPr id="195" name="Shape 193"/>
           <p:cNvSpPr/>
           <p:nvPr/>
         </p:nvSpPr>
@@ -7089,7 +7214,7 @@
       </p:sp>
       <p:sp>
         <p:nvSpPr>
-          <p:cNvPr id="192" name="Shape 190"/>
+          <p:cNvPr id="196" name="Shape 194"/>
           <p:cNvSpPr/>
           <p:nvPr/>
         </p:nvSpPr>
@@ -7114,7 +7239,7 @@
       </p:sp>
       <p:sp>
         <p:nvSpPr>
-          <p:cNvPr id="193" name="Text 191"/>
+          <p:cNvPr id="197" name="Text 195"/>
           <p:cNvSpPr/>
           <p:nvPr/>
         </p:nvSpPr>
@@ -7150,7 +7275,7 @@
       </p:sp>
       <p:sp>
         <p:nvSpPr>
-          <p:cNvPr id="194" name="Text 192"/>
+          <p:cNvPr id="198" name="Text 196"/>
           <p:cNvSpPr/>
           <p:nvPr/>
         </p:nvSpPr>
@@ -7178,7 +7303,7 @@
                   <a:srgbClr val="888888"/>
                 </a:solidFill>
               </a:rPr>
-              <a:t>34h estimadas</a:t>
+              <a:t>37h estimadas</a:t>
             </a:r>
             <a:endParaRPr lang="en-US" sz="850" dirty="0"/>
           </a:p>
@@ -7186,7 +7311,7 @@
       </p:sp>
       <p:sp>
         <p:nvSpPr>
-          <p:cNvPr id="195" name="Shape 193"/>
+          <p:cNvPr id="199" name="Shape 197"/>
           <p:cNvSpPr/>
           <p:nvPr/>
         </p:nvSpPr>
@@ -7218,7 +7343,7 @@
       </p:sp>
       <p:sp>
         <p:nvSpPr>
-          <p:cNvPr id="196" name="Text 194"/>
+          <p:cNvPr id="200" name="Text 198"/>
           <p:cNvSpPr/>
           <p:nvPr/>
         </p:nvSpPr>
@@ -7254,7 +7379,7 @@
       </p:sp>
       <p:sp>
         <p:nvSpPr>
-          <p:cNvPr id="197" name="Shape 195"/>
+          <p:cNvPr id="201" name="Shape 199"/>
           <p:cNvSpPr/>
           <p:nvPr/>
         </p:nvSpPr>
@@ -7279,7 +7404,7 @@
       </p:sp>
       <p:sp>
         <p:nvSpPr>
-          <p:cNvPr id="198" name="Shape 196"/>
+          <p:cNvPr id="202" name="Shape 200"/>
           <p:cNvSpPr/>
           <p:nvPr/>
         </p:nvSpPr>
@@ -7304,7 +7429,7 @@
       </p:sp>
       <p:sp>
         <p:nvSpPr>
-          <p:cNvPr id="199" name="Text 197"/>
+          <p:cNvPr id="203" name="Text 201"/>
           <p:cNvSpPr/>
           <p:nvPr/>
         </p:nvSpPr>
@@ -7340,7 +7465,7 @@
       </p:sp>
       <p:sp>
         <p:nvSpPr>
-          <p:cNvPr id="200" name="Text 198"/>
+          <p:cNvPr id="204" name="Text 202"/>
           <p:cNvSpPr/>
           <p:nvPr/>
         </p:nvSpPr>
@@ -7376,7 +7501,7 @@
       </p:sp>
       <p:sp>
         <p:nvSpPr>
-          <p:cNvPr id="201" name="Shape 199"/>
+          <p:cNvPr id="205" name="Shape 203"/>
           <p:cNvSpPr/>
           <p:nvPr/>
         </p:nvSpPr>
@@ -7408,7 +7533,7 @@
       </p:sp>
       <p:sp>
         <p:nvSpPr>
-          <p:cNvPr id="202" name="Text 200"/>
+          <p:cNvPr id="206" name="Text 204"/>
           <p:cNvSpPr/>
           <p:nvPr/>
         </p:nvSpPr>
@@ -7444,7 +7569,7 @@
       </p:sp>
       <p:sp>
         <p:nvSpPr>
-          <p:cNvPr id="203" name="Shape 201"/>
+          <p:cNvPr id="207" name="Shape 205"/>
           <p:cNvSpPr/>
           <p:nvPr/>
         </p:nvSpPr>
@@ -7469,7 +7594,7 @@
       </p:sp>
       <p:sp>
         <p:nvSpPr>
-          <p:cNvPr id="204" name="Shape 202"/>
+          <p:cNvPr id="208" name="Shape 206"/>
           <p:cNvSpPr/>
           <p:nvPr/>
         </p:nvSpPr>
@@ -7494,7 +7619,7 @@
       </p:sp>
       <p:sp>
         <p:nvSpPr>
-          <p:cNvPr id="205" name="Text 203"/>
+          <p:cNvPr id="209" name="Text 207"/>
           <p:cNvSpPr/>
           <p:nvPr/>
         </p:nvSpPr>
@@ -7530,7 +7655,7 @@
       </p:sp>
       <p:sp>
         <p:nvSpPr>
-          <p:cNvPr id="206" name="Text 204"/>
+          <p:cNvPr id="210" name="Text 208"/>
           <p:cNvSpPr/>
           <p:nvPr/>
         </p:nvSpPr>
@@ -7566,7 +7691,7 @@
       </p:sp>
       <p:sp>
         <p:nvSpPr>
-          <p:cNvPr id="207" name="Shape 205"/>
+          <p:cNvPr id="211" name="Shape 209"/>
           <p:cNvSpPr/>
           <p:nvPr/>
         </p:nvSpPr>
@@ -7598,7 +7723,7 @@
       </p:sp>
       <p:sp>
         <p:nvSpPr>
-          <p:cNvPr id="208" name="Text 206"/>
+          <p:cNvPr id="212" name="Text 210"/>
           <p:cNvSpPr/>
           <p:nvPr/>
         </p:nvSpPr>
@@ -7634,7 +7759,7 @@
       </p:sp>
       <p:sp>
         <p:nvSpPr>
-          <p:cNvPr id="209" name="Shape 207"/>
+          <p:cNvPr id="213" name="Shape 211"/>
           <p:cNvSpPr/>
           <p:nvPr/>
         </p:nvSpPr>
@@ -7659,7 +7784,7 @@
       </p:sp>
       <p:sp>
         <p:nvSpPr>
-          <p:cNvPr id="210" name="Shape 208"/>
+          <p:cNvPr id="214" name="Shape 212"/>
           <p:cNvSpPr/>
           <p:nvPr/>
         </p:nvSpPr>
@@ -7684,7 +7809,7 @@
       </p:sp>
       <p:sp>
         <p:nvSpPr>
-          <p:cNvPr id="211" name="Text 209"/>
+          <p:cNvPr id="215" name="Text 213"/>
           <p:cNvSpPr/>
           <p:nvPr/>
         </p:nvSpPr>
@@ -7720,7 +7845,7 @@
       </p:sp>
       <p:sp>
         <p:nvSpPr>
-          <p:cNvPr id="212" name="Text 210"/>
+          <p:cNvPr id="216" name="Text 214"/>
           <p:cNvSpPr/>
           <p:nvPr/>
         </p:nvSpPr>
